--- a/slides/PV_spin1.pptx
+++ b/slides/PV_spin1.pptx
@@ -17881,7 +17881,7 @@
         <p:spPr>
           <a:xfrm>
             <a:off x="830263" y="1376363"/>
-            <a:ext cx="7264400" cy="4801314"/>
+            <a:ext cx="7264400" cy="5078313"/>
           </a:xfrm>
           <a:prstGeom prst="rect">
             <a:avLst/>
@@ -18188,7 +18188,19 @@
                 <a:latin typeface="Courier New" pitchFamily="49" charset="0"/>
                 <a:cs typeface="Courier New" pitchFamily="49" charset="0"/>
               </a:rPr>
-              <a:t>] = 1 ;// eat ...</a:t>
+              <a:t>] = 1 ;</a:t>
+            </a:r>
+          </a:p>
+          <a:p>
+            <a:pPr>
+              <a:defRPr/>
+            </a:pPr>
+            <a:r>
+              <a:rPr lang="en-US" sz="1800" dirty="0">
+                <a:latin typeface="Courier New" pitchFamily="49" charset="0"/>
+                <a:cs typeface="Courier New" pitchFamily="49" charset="0"/>
+              </a:rPr>
+              <a:t>     // eat ...</a:t>
             </a:r>
           </a:p>
           <a:p>
@@ -19084,7 +19096,7 @@
         <p:spPr>
           <a:xfrm>
             <a:off x="830263" y="1376363"/>
-            <a:ext cx="7608887" cy="3294062"/>
+            <a:ext cx="7608887" cy="3539430"/>
           </a:xfrm>
           <a:prstGeom prst="rect">
             <a:avLst/>
@@ -19327,6 +19339,19 @@
               </a:rPr>
               <a:t>] = 1 ;</a:t>
             </a:r>
+            <a:br>
+              <a:rPr lang="en-US" sz="1600" dirty="0">
+                <a:latin typeface="Courier New" pitchFamily="49" charset="0"/>
+                <a:cs typeface="Courier New" pitchFamily="49" charset="0"/>
+              </a:rPr>
+            </a:br>
+            <a:r>
+              <a:rPr lang="en-US" sz="1600" dirty="0">
+                <a:latin typeface="Courier New" pitchFamily="49" charset="0"/>
+                <a:cs typeface="Courier New" pitchFamily="49" charset="0"/>
+              </a:rPr>
+              <a:t>	 //... eat</a:t>
+            </a:r>
           </a:p>
           <a:p>
             <a:pPr>
@@ -19466,8 +19491,8 @@
         </p:nvCxnSpPr>
         <p:spPr>
           <a:xfrm flipH="1" flipV="1">
-            <a:off x="3239589" y="2795451"/>
-            <a:ext cx="3410540" cy="1043124"/>
+            <a:off x="3855308" y="3019425"/>
+            <a:ext cx="2794821" cy="819150"/>
           </a:xfrm>
           <a:prstGeom prst="line">
             <a:avLst/>
@@ -25251,7 +25276,7 @@
         <p:spPr>
           <a:xfrm>
             <a:off x="579438" y="1165225"/>
-            <a:ext cx="6801862" cy="4093428"/>
+            <a:ext cx="7417415" cy="4093428"/>
           </a:xfrm>
           <a:prstGeom prst="rect">
             <a:avLst/>
@@ -25437,7 +25462,26 @@
                 <a:latin typeface="Courier New" pitchFamily="49" charset="0"/>
                 <a:cs typeface="Courier New" pitchFamily="49" charset="0"/>
               </a:rPr>
-              <a:t>   :: in ? </a:t>
+              <a:t>   :: </a:t>
+            </a:r>
+            <a:r>
+              <a:rPr lang="en-US" sz="2000" b="1" dirty="0">
+                <a:solidFill>
+                  <a:schemeClr val="bg2">
+                    <a:lumMod val="50000"/>
+                  </a:schemeClr>
+                </a:solidFill>
+                <a:latin typeface="Courier New" pitchFamily="49" charset="0"/>
+                <a:cs typeface="Courier New" pitchFamily="49" charset="0"/>
+              </a:rPr>
+              <a:t>S2: </a:t>
+            </a:r>
+            <a:r>
+              <a:rPr lang="en-US" sz="2000" dirty="0">
+                <a:latin typeface="Courier New" pitchFamily="49" charset="0"/>
+                <a:cs typeface="Courier New" pitchFamily="49" charset="0"/>
+              </a:rPr>
+              <a:t>in ? </a:t>
             </a:r>
             <a:r>
               <a:rPr lang="en-US" sz="2000" dirty="0" err="1">
@@ -25527,7 +25571,26 @@
                 <a:latin typeface="Courier New" pitchFamily="49" charset="0"/>
                 <a:cs typeface="Courier New" pitchFamily="49" charset="0"/>
               </a:rPr>
-              <a:t> ; out!1</a:t>
+              <a:t> ; </a:t>
+            </a:r>
+            <a:r>
+              <a:rPr lang="en-US" sz="2000" dirty="0">
+                <a:solidFill>
+                  <a:schemeClr val="bg2">
+                    <a:lumMod val="50000"/>
+                  </a:schemeClr>
+                </a:solidFill>
+                <a:latin typeface="Courier New" pitchFamily="49" charset="0"/>
+                <a:cs typeface="Courier New" pitchFamily="49" charset="0"/>
+              </a:rPr>
+              <a:t>S3: </a:t>
+            </a:r>
+            <a:r>
+              <a:rPr lang="en-US" sz="2000" dirty="0">
+                <a:latin typeface="Courier New" pitchFamily="49" charset="0"/>
+                <a:cs typeface="Courier New" pitchFamily="49" charset="0"/>
+              </a:rPr>
+              <a:t>out!1</a:t>
             </a:r>
           </a:p>
           <a:p>
@@ -25676,8 +25739,8 @@
         </p:nvSpPr>
         <p:spPr bwMode="auto">
           <a:xfrm>
-            <a:off x="7719239" y="1193938"/>
-            <a:ext cx="1600200" cy="954087"/>
+            <a:off x="7996853" y="1193938"/>
+            <a:ext cx="1147147" cy="1169551"/>
           </a:xfrm>
           <a:prstGeom prst="rect">
             <a:avLst/>
@@ -25691,7 +25754,7 @@
           </a:ln>
         </p:spPr>
         <p:txBody>
-          <a:bodyPr>
+          <a:bodyPr wrap="square">
             <a:spAutoFit/>
           </a:bodyPr>
           <a:lstStyle/>
